--- a/slides/인공지능_4장_신경망_학습.pptx
+++ b/slides/인공지능_4장_신경망_학습.pptx
@@ -226,7 +226,7 @@
           <a:p>
             <a:fld id="{A6504E4A-07F7-4F02-B3E2-C3B5C1401BF2}" type="datetimeFigureOut">
               <a:rPr lang="ko-KR" altLang="en-US" smtClean="0"/>
-              <a:t>2026-09-28</a:t>
+              <a:t>2026-09-29</a:t>
             </a:fld>
             <a:endParaRPr lang="ko-KR" altLang="en-US"/>
           </a:p>
@@ -714,7 +714,7 @@
           <a:p>
             <a:fld id="{B59DDA34-7199-4152-B139-CF9C99ABF21A}" type="datetime1">
               <a:rPr lang="ko-KR" altLang="en-US" smtClean="0"/>
-              <a:t>2026-09-28</a:t>
+              <a:t>2026-09-29</a:t>
             </a:fld>
             <a:endParaRPr lang="ko-KR" altLang="en-US"/>
           </a:p>
@@ -892,7 +892,7 @@
           <a:p>
             <a:fld id="{50464A5E-0FE9-46B1-A756-698C471C8CE4}" type="datetime1">
               <a:rPr lang="ko-KR" altLang="en-US" smtClean="0"/>
-              <a:t>2026-09-28</a:t>
+              <a:t>2026-09-29</a:t>
             </a:fld>
             <a:endParaRPr lang="ko-KR" altLang="en-US"/>
           </a:p>
@@ -1080,7 +1080,7 @@
           <a:p>
             <a:fld id="{F3F6BF92-FE1E-416A-89CC-B18A2556F974}" type="datetime1">
               <a:rPr lang="ko-KR" altLang="en-US" smtClean="0"/>
-              <a:t>2026-09-28</a:t>
+              <a:t>2026-09-29</a:t>
             </a:fld>
             <a:endParaRPr lang="ko-KR" altLang="en-US"/>
           </a:p>
@@ -1328,7 +1328,7 @@
           <a:p>
             <a:fld id="{BFBB1C4F-3B12-4648-A3D5-122AD80BDAD3}" type="datetime1">
               <a:rPr lang="ko-KR" altLang="en-US" smtClean="0"/>
-              <a:t>2026-09-28</a:t>
+              <a:t>2026-09-29</a:t>
             </a:fld>
             <a:endParaRPr lang="en-US" altLang="ko-KR"/>
           </a:p>
@@ -1595,7 +1595,7 @@
           <a:p>
             <a:fld id="{C5F2219D-F487-4189-9F85-A13E4525EE11}" type="datetime1">
               <a:rPr lang="ko-KR" altLang="en-US" smtClean="0"/>
-              <a:t>2026-09-28</a:t>
+              <a:t>2026-09-29</a:t>
             </a:fld>
             <a:endParaRPr lang="en-US" altLang="ko-KR"/>
           </a:p>
@@ -1831,7 +1831,7 @@
           <a:p>
             <a:fld id="{413BC7AB-AE76-4283-A57E-77851087E2C1}" type="datetime1">
               <a:rPr lang="ko-KR" altLang="en-US" smtClean="0"/>
-              <a:t>2026-09-28</a:t>
+              <a:t>2026-09-29</a:t>
             </a:fld>
             <a:endParaRPr lang="en-US" altLang="ko-KR"/>
           </a:p>
@@ -2098,7 +2098,7 @@
           <a:p>
             <a:fld id="{4A646FA3-3ED5-4576-B30E-6778D7DEE8AD}" type="datetime1">
               <a:rPr lang="ko-KR" altLang="en-US" smtClean="0"/>
-              <a:t>2026-09-28</a:t>
+              <a:t>2026-09-29</a:t>
             </a:fld>
             <a:endParaRPr lang="en-US" altLang="ko-KR"/>
           </a:p>
@@ -2718,7 +2718,7 @@
           <a:p>
             <a:fld id="{2495EB55-4F29-4197-95E1-A5B715D579C4}" type="datetime1">
               <a:rPr lang="ko-KR" altLang="en-US" smtClean="0"/>
-              <a:t>2026-09-28</a:t>
+              <a:t>2026-09-29</a:t>
             </a:fld>
             <a:endParaRPr lang="ko-KR" altLang="en-US"/>
           </a:p>
@@ -2980,7 +2980,7 @@
           <a:p>
             <a:fld id="{98F917C5-633B-4C85-8C0F-0E8A1B3578B2}" type="datetime1">
               <a:rPr lang="ko-KR" altLang="en-US" smtClean="0"/>
-              <a:t>2026-09-28</a:t>
+              <a:t>2026-09-29</a:t>
             </a:fld>
             <a:endParaRPr lang="ko-KR" altLang="en-US"/>
           </a:p>
@@ -3220,7 +3220,7 @@
           <a:p>
             <a:fld id="{604A2B97-E62C-40A0-B78F-BD701735623C}" type="datetime1">
               <a:rPr lang="ko-KR" altLang="en-US" smtClean="0"/>
-              <a:t>2026-09-28</a:t>
+              <a:t>2026-09-29</a:t>
             </a:fld>
             <a:endParaRPr lang="ko-KR" altLang="en-US"/>
           </a:p>
@@ -3595,7 +3595,7 @@
           <a:p>
             <a:fld id="{31DEA5F0-2015-4076-90EE-D70D0B683C4F}" type="datetime1">
               <a:rPr lang="ko-KR" altLang="en-US" smtClean="0"/>
-              <a:t>2026-09-28</a:t>
+              <a:t>2026-09-29</a:t>
             </a:fld>
             <a:endParaRPr lang="ko-KR" altLang="en-US"/>
           </a:p>
@@ -3721,7 +3721,7 @@
           <a:p>
             <a:fld id="{FF049EF0-A209-4797-B9D5-D9993706EC87}" type="datetime1">
               <a:rPr lang="ko-KR" altLang="en-US" smtClean="0"/>
-              <a:t>2026-09-28</a:t>
+              <a:t>2026-09-29</a:t>
             </a:fld>
             <a:endParaRPr lang="ko-KR" altLang="en-US"/>
           </a:p>
@@ -3824,7 +3824,7 @@
           <a:p>
             <a:fld id="{D1A7AE1A-575D-498C-BD48-A00EB7F07D65}" type="datetime1">
               <a:rPr lang="ko-KR" altLang="en-US" smtClean="0"/>
-              <a:t>2026-09-28</a:t>
+              <a:t>2026-09-29</a:t>
             </a:fld>
             <a:endParaRPr lang="ko-KR" altLang="en-US"/>
           </a:p>
@@ -4109,7 +4109,7 @@
           <a:p>
             <a:fld id="{63B9C8B1-550D-413E-9D8B-DB541A113454}" type="datetime1">
               <a:rPr lang="ko-KR" altLang="en-US" smtClean="0"/>
-              <a:t>2026-09-28</a:t>
+              <a:t>2026-09-29</a:t>
             </a:fld>
             <a:endParaRPr lang="ko-KR" altLang="en-US"/>
           </a:p>
@@ -4374,7 +4374,7 @@
           <a:p>
             <a:fld id="{139E09ED-21BB-4C37-865B-F256148AE2FA}" type="datetime1">
               <a:rPr lang="ko-KR" altLang="en-US" smtClean="0"/>
-              <a:t>2026-09-28</a:t>
+              <a:t>2026-09-29</a:t>
             </a:fld>
             <a:endParaRPr lang="ko-KR" altLang="en-US"/>
           </a:p>
@@ -4595,7 +4595,7 @@
           <a:p>
             <a:fld id="{2737AE23-F23F-45CE-9FDB-BBBFA9B01E64}" type="datetime1">
               <a:rPr lang="ko-KR" altLang="en-US" smtClean="0"/>
-              <a:t>2026-09-28</a:t>
+              <a:t>2026-09-29</a:t>
             </a:fld>
             <a:endParaRPr lang="ko-KR" altLang="en-US"/>
           </a:p>
@@ -6230,10 +6230,10 @@
       </p:pic>
       <p:pic>
         <p:nvPicPr>
-          <p:cNvPr id="12" name="그림 11">
-            <a:extLst>
-              <a:ext uri="{FF2B5EF4-FFF2-40B4-BE49-F238E27FC236}">
-                <a16:creationId xmlns:a16="http://schemas.microsoft.com/office/drawing/2014/main" id="{EFAD699F-92D2-DB81-0166-03F121F59418}"/>
+          <p:cNvPr id="14" name="그림 13">
+            <a:extLst>
+              <a:ext uri="{FF2B5EF4-FFF2-40B4-BE49-F238E27FC236}">
+                <a16:creationId xmlns:a16="http://schemas.microsoft.com/office/drawing/2014/main" id="{A3567D77-E1C8-FC2B-0383-2E538195020D}"/>
               </a:ext>
             </a:extLst>
           </p:cNvPr>
@@ -6250,8 +6250,8 @@
         </p:blipFill>
         <p:spPr>
           <a:xfrm>
-            <a:off x="1206018" y="1712921"/>
-            <a:ext cx="4115374" cy="1600423"/>
+            <a:off x="1246520" y="4527113"/>
+            <a:ext cx="4334480" cy="1705213"/>
           </a:xfrm>
           <a:prstGeom prst="rect">
             <a:avLst/>
@@ -6260,10 +6260,10 @@
       </p:pic>
       <p:pic>
         <p:nvPicPr>
-          <p:cNvPr id="14" name="그림 13">
-            <a:extLst>
-              <a:ext uri="{FF2B5EF4-FFF2-40B4-BE49-F238E27FC236}">
-                <a16:creationId xmlns:a16="http://schemas.microsoft.com/office/drawing/2014/main" id="{A3567D77-E1C8-FC2B-0383-2E538195020D}"/>
+          <p:cNvPr id="7" name="그림 6">
+            <a:extLst>
+              <a:ext uri="{FF2B5EF4-FFF2-40B4-BE49-F238E27FC236}">
+                <a16:creationId xmlns:a16="http://schemas.microsoft.com/office/drawing/2014/main" id="{15958E27-FAA2-5D6B-0C65-47A42F6D7CC8}"/>
               </a:ext>
             </a:extLst>
           </p:cNvPr>
@@ -6280,8 +6280,8 @@
         </p:blipFill>
         <p:spPr>
           <a:xfrm>
-            <a:off x="1246520" y="4527113"/>
-            <a:ext cx="4334480" cy="1705213"/>
+            <a:off x="1671425" y="1628524"/>
+            <a:ext cx="4220164" cy="1800476"/>
           </a:xfrm>
           <a:prstGeom prst="rect">
             <a:avLst/>

--- a/slides/인공지능_4장_신경망_학습.pptx
+++ b/slides/인공지능_4장_신경망_학습.pptx
@@ -226,7 +226,7 @@
           <a:p>
             <a:fld id="{A6504E4A-07F7-4F02-B3E2-C3B5C1401BF2}" type="datetimeFigureOut">
               <a:rPr lang="ko-KR" altLang="en-US" smtClean="0"/>
-              <a:t>2026-09-29</a:t>
+              <a:t>2026-10-06</a:t>
             </a:fld>
             <a:endParaRPr lang="ko-KR" altLang="en-US"/>
           </a:p>
@@ -714,7 +714,7 @@
           <a:p>
             <a:fld id="{B59DDA34-7199-4152-B139-CF9C99ABF21A}" type="datetime1">
               <a:rPr lang="ko-KR" altLang="en-US" smtClean="0"/>
-              <a:t>2026-09-29</a:t>
+              <a:t>2026-10-06</a:t>
             </a:fld>
             <a:endParaRPr lang="ko-KR" altLang="en-US"/>
           </a:p>
@@ -892,7 +892,7 @@
           <a:p>
             <a:fld id="{50464A5E-0FE9-46B1-A756-698C471C8CE4}" type="datetime1">
               <a:rPr lang="ko-KR" altLang="en-US" smtClean="0"/>
-              <a:t>2026-09-29</a:t>
+              <a:t>2026-10-06</a:t>
             </a:fld>
             <a:endParaRPr lang="ko-KR" altLang="en-US"/>
           </a:p>
@@ -1080,7 +1080,7 @@
           <a:p>
             <a:fld id="{F3F6BF92-FE1E-416A-89CC-B18A2556F974}" type="datetime1">
               <a:rPr lang="ko-KR" altLang="en-US" smtClean="0"/>
-              <a:t>2026-09-29</a:t>
+              <a:t>2026-10-06</a:t>
             </a:fld>
             <a:endParaRPr lang="ko-KR" altLang="en-US"/>
           </a:p>
@@ -1328,7 +1328,7 @@
           <a:p>
             <a:fld id="{BFBB1C4F-3B12-4648-A3D5-122AD80BDAD3}" type="datetime1">
               <a:rPr lang="ko-KR" altLang="en-US" smtClean="0"/>
-              <a:t>2026-09-29</a:t>
+              <a:t>2026-10-06</a:t>
             </a:fld>
             <a:endParaRPr lang="en-US" altLang="ko-KR"/>
           </a:p>
@@ -1595,7 +1595,7 @@
           <a:p>
             <a:fld id="{C5F2219D-F487-4189-9F85-A13E4525EE11}" type="datetime1">
               <a:rPr lang="ko-KR" altLang="en-US" smtClean="0"/>
-              <a:t>2026-09-29</a:t>
+              <a:t>2026-10-06</a:t>
             </a:fld>
             <a:endParaRPr lang="en-US" altLang="ko-KR"/>
           </a:p>
@@ -1831,7 +1831,7 @@
           <a:p>
             <a:fld id="{413BC7AB-AE76-4283-A57E-77851087E2C1}" type="datetime1">
               <a:rPr lang="ko-KR" altLang="en-US" smtClean="0"/>
-              <a:t>2026-09-29</a:t>
+              <a:t>2026-10-06</a:t>
             </a:fld>
             <a:endParaRPr lang="en-US" altLang="ko-KR"/>
           </a:p>
@@ -2098,7 +2098,7 @@
           <a:p>
             <a:fld id="{4A646FA3-3ED5-4576-B30E-6778D7DEE8AD}" type="datetime1">
               <a:rPr lang="ko-KR" altLang="en-US" smtClean="0"/>
-              <a:t>2026-09-29</a:t>
+              <a:t>2026-10-06</a:t>
             </a:fld>
             <a:endParaRPr lang="en-US" altLang="ko-KR"/>
           </a:p>
@@ -2718,7 +2718,7 @@
           <a:p>
             <a:fld id="{2495EB55-4F29-4197-95E1-A5B715D579C4}" type="datetime1">
               <a:rPr lang="ko-KR" altLang="en-US" smtClean="0"/>
-              <a:t>2026-09-29</a:t>
+              <a:t>2026-10-06</a:t>
             </a:fld>
             <a:endParaRPr lang="ko-KR" altLang="en-US"/>
           </a:p>
@@ -2980,7 +2980,7 @@
           <a:p>
             <a:fld id="{98F917C5-633B-4C85-8C0F-0E8A1B3578B2}" type="datetime1">
               <a:rPr lang="ko-KR" altLang="en-US" smtClean="0"/>
-              <a:t>2026-09-29</a:t>
+              <a:t>2026-10-06</a:t>
             </a:fld>
             <a:endParaRPr lang="ko-KR" altLang="en-US"/>
           </a:p>
@@ -3220,7 +3220,7 @@
           <a:p>
             <a:fld id="{604A2B97-E62C-40A0-B78F-BD701735623C}" type="datetime1">
               <a:rPr lang="ko-KR" altLang="en-US" smtClean="0"/>
-              <a:t>2026-09-29</a:t>
+              <a:t>2026-10-06</a:t>
             </a:fld>
             <a:endParaRPr lang="ko-KR" altLang="en-US"/>
           </a:p>
@@ -3595,7 +3595,7 @@
           <a:p>
             <a:fld id="{31DEA5F0-2015-4076-90EE-D70D0B683C4F}" type="datetime1">
               <a:rPr lang="ko-KR" altLang="en-US" smtClean="0"/>
-              <a:t>2026-09-29</a:t>
+              <a:t>2026-10-06</a:t>
             </a:fld>
             <a:endParaRPr lang="ko-KR" altLang="en-US"/>
           </a:p>
@@ -3721,7 +3721,7 @@
           <a:p>
             <a:fld id="{FF049EF0-A209-4797-B9D5-D9993706EC87}" type="datetime1">
               <a:rPr lang="ko-KR" altLang="en-US" smtClean="0"/>
-              <a:t>2026-09-29</a:t>
+              <a:t>2026-10-06</a:t>
             </a:fld>
             <a:endParaRPr lang="ko-KR" altLang="en-US"/>
           </a:p>
@@ -3824,7 +3824,7 @@
           <a:p>
             <a:fld id="{D1A7AE1A-575D-498C-BD48-A00EB7F07D65}" type="datetime1">
               <a:rPr lang="ko-KR" altLang="en-US" smtClean="0"/>
-              <a:t>2026-09-29</a:t>
+              <a:t>2026-10-06</a:t>
             </a:fld>
             <a:endParaRPr lang="ko-KR" altLang="en-US"/>
           </a:p>
@@ -4109,7 +4109,7 @@
           <a:p>
             <a:fld id="{63B9C8B1-550D-413E-9D8B-DB541A113454}" type="datetime1">
               <a:rPr lang="ko-KR" altLang="en-US" smtClean="0"/>
-              <a:t>2026-09-29</a:t>
+              <a:t>2026-10-06</a:t>
             </a:fld>
             <a:endParaRPr lang="ko-KR" altLang="en-US"/>
           </a:p>
@@ -4374,7 +4374,7 @@
           <a:p>
             <a:fld id="{139E09ED-21BB-4C37-865B-F256148AE2FA}" type="datetime1">
               <a:rPr lang="ko-KR" altLang="en-US" smtClean="0"/>
-              <a:t>2026-09-29</a:t>
+              <a:t>2026-10-06</a:t>
             </a:fld>
             <a:endParaRPr lang="ko-KR" altLang="en-US"/>
           </a:p>
@@ -4595,7 +4595,7 @@
           <a:p>
             <a:fld id="{2737AE23-F23F-45CE-9FDB-BBBFA9B01E64}" type="datetime1">
               <a:rPr lang="ko-KR" altLang="en-US" smtClean="0"/>
-              <a:t>2026-09-29</a:t>
+              <a:t>2026-10-06</a:t>
             </a:fld>
             <a:endParaRPr lang="ko-KR" altLang="en-US"/>
           </a:p>
@@ -10764,10 +10764,10 @@
       </p:sp>
       <p:pic>
         <p:nvPicPr>
-          <p:cNvPr id="5" name="그림 4">
-            <a:extLst>
-              <a:ext uri="{FF2B5EF4-FFF2-40B4-BE49-F238E27FC236}">
-                <a16:creationId xmlns:a16="http://schemas.microsoft.com/office/drawing/2014/main" id="{D99A34D1-47AA-449C-2CC9-33262C1452A3}"/>
+          <p:cNvPr id="6" name="그림 5">
+            <a:extLst>
+              <a:ext uri="{FF2B5EF4-FFF2-40B4-BE49-F238E27FC236}">
+                <a16:creationId xmlns:a16="http://schemas.microsoft.com/office/drawing/2014/main" id="{04B410A8-4A19-A9BE-E74D-CC93FF40600B}"/>
               </a:ext>
             </a:extLst>
           </p:cNvPr>
@@ -10784,8 +10784,8 @@
         </p:blipFill>
         <p:spPr>
           <a:xfrm>
-            <a:off x="536431" y="1003495"/>
-            <a:ext cx="4035569" cy="5559083"/>
+            <a:off x="436099" y="1197237"/>
+            <a:ext cx="4751901" cy="5149638"/>
           </a:xfrm>
           <a:prstGeom prst="rect">
             <a:avLst/>
